--- a/assets/ppt/cfg/cfg3-pda.pptx
+++ b/assets/ppt/cfg/cfg3-pda.pptx
@@ -5,10 +5,10 @@
     <p:sldMasterId id="2147483672" r:id="rId1"/>
   </p:sldMasterIdLst>
   <p:notesMasterIdLst>
-    <p:notesMasterId r:id="rId12"/>
+    <p:notesMasterId r:id="rId11"/>
   </p:notesMasterIdLst>
   <p:handoutMasterIdLst>
-    <p:handoutMasterId r:id="rId13"/>
+    <p:handoutMasterId r:id="rId12"/>
   </p:handoutMasterIdLst>
   <p:sldIdLst>
     <p:sldId id="309" r:id="rId2"/>
@@ -16,11 +16,10 @@
     <p:sldId id="308" r:id="rId4"/>
     <p:sldId id="311" r:id="rId5"/>
     <p:sldId id="300" r:id="rId6"/>
-    <p:sldId id="312" r:id="rId7"/>
-    <p:sldId id="298" r:id="rId8"/>
-    <p:sldId id="310" r:id="rId9"/>
-    <p:sldId id="307" r:id="rId10"/>
-    <p:sldId id="306" r:id="rId11"/>
+    <p:sldId id="298" r:id="rId7"/>
+    <p:sldId id="310" r:id="rId8"/>
+    <p:sldId id="307" r:id="rId9"/>
+    <p:sldId id="306" r:id="rId10"/>
   </p:sldIdLst>
   <p:sldSz cx="9144000" cy="5143500" type="screen16x9"/>
   <p:notesSz cx="6858000" cy="9144000"/>
@@ -1149,7 +1148,7 @@
             <a:fld id="{3F419F97-9A4D-614C-9812-FBCE0BF04631}" type="slidenum">
               <a:rPr lang="en-US"/>
               <a:pPr/>
-              <a:t>7</a:t>
+              <a:t>6</a:t>
             </a:fld>
             <a:endParaRPr lang="en-US"/>
           </a:p>
@@ -1237,7 +1236,7 @@
             <a:fld id="{C10B287A-9173-D649-AE51-41A2A40684EA}" type="slidenum">
               <a:rPr lang="en-US"/>
               <a:pPr/>
-              <a:t>9</a:t>
+              <a:t>8</a:t>
             </a:fld>
             <a:endParaRPr lang="en-US"/>
           </a:p>
@@ -1325,7 +1324,7 @@
             <a:fld id="{5D217D9E-1088-7D41-A8E2-274BE0BD32B8}" type="slidenum">
               <a:rPr lang="en-US"/>
               <a:pPr/>
-              <a:t>10</a:t>
+              <a:t>9</a:t>
             </a:fld>
             <a:endParaRPr lang="en-US"/>
           </a:p>
@@ -1523,7 +1522,7 @@
           <a:p>
             <a:fld id="{1B6DC762-1116-2146-A47C-D79A5A5DBAFD}" type="datetime1">
               <a:rPr lang="en-CA" smtClean="0"/>
-              <a:t>2020-09-27</a:t>
+              <a:t>2025-06-09</a:t>
             </a:fld>
             <a:endParaRPr lang="en-US"/>
           </a:p>
@@ -1721,7 +1720,7 @@
           <a:p>
             <a:fld id="{725FEDD1-5A1B-2342-BAF0-F7C5511A73CE}" type="datetime1">
               <a:rPr lang="en-CA" smtClean="0"/>
-              <a:t>2020-09-27</a:t>
+              <a:t>2025-06-09</a:t>
             </a:fld>
             <a:endParaRPr lang="en-US"/>
           </a:p>
@@ -1929,7 +1928,7 @@
           <a:p>
             <a:fld id="{F09E59AE-0AE1-4048-8BD6-D39FC0EBB194}" type="datetime1">
               <a:rPr lang="en-CA" smtClean="0"/>
-              <a:t>2020-09-27</a:t>
+              <a:t>2025-06-09</a:t>
             </a:fld>
             <a:endParaRPr lang="en-US"/>
           </a:p>
@@ -3404,7 +3403,7 @@
           <a:p>
             <a:fld id="{A2849525-9B7D-5945-A782-775278635E42}" type="datetime1">
               <a:rPr lang="en-CA" smtClean="0"/>
-              <a:t>2020-09-27</a:t>
+              <a:t>2025-06-09</a:t>
             </a:fld>
             <a:endParaRPr lang="en-US"/>
           </a:p>
@@ -3679,7 +3678,7 @@
           <a:p>
             <a:fld id="{D05E1499-BDD1-6940-8C79-13A8B8E63D57}" type="datetime1">
               <a:rPr lang="en-CA" smtClean="0"/>
-              <a:t>2020-09-27</a:t>
+              <a:t>2025-06-09</a:t>
             </a:fld>
             <a:endParaRPr lang="en-US"/>
           </a:p>
@@ -3944,7 +3943,7 @@
           <a:p>
             <a:fld id="{17E70EF3-18A7-4644-8DA2-1EB9CA66C736}" type="datetime1">
               <a:rPr lang="en-CA" smtClean="0"/>
-              <a:t>2020-09-27</a:t>
+              <a:t>2025-06-09</a:t>
             </a:fld>
             <a:endParaRPr lang="en-US"/>
           </a:p>
@@ -4356,7 +4355,7 @@
           <a:p>
             <a:fld id="{54538FC1-2481-FB4A-91E5-87F3422DE2D5}" type="datetime1">
               <a:rPr lang="en-CA" smtClean="0"/>
-              <a:t>2020-09-27</a:t>
+              <a:t>2025-06-09</a:t>
             </a:fld>
             <a:endParaRPr lang="en-US"/>
           </a:p>
@@ -4497,7 +4496,7 @@
           <a:p>
             <a:fld id="{93D5C515-1622-C840-89B2-A4A55D34866A}" type="datetime1">
               <a:rPr lang="en-CA" smtClean="0"/>
-              <a:t>2020-09-27</a:t>
+              <a:t>2025-06-09</a:t>
             </a:fld>
             <a:endParaRPr lang="en-US"/>
           </a:p>
@@ -4610,7 +4609,7 @@
           <a:p>
             <a:fld id="{B9077E75-6C88-BB47-AC6F-0DCA859E7113}" type="datetime1">
               <a:rPr lang="en-CA" smtClean="0"/>
-              <a:t>2020-09-27</a:t>
+              <a:t>2025-06-09</a:t>
             </a:fld>
             <a:endParaRPr lang="en-US"/>
           </a:p>
@@ -4921,7 +4920,7 @@
           <a:p>
             <a:fld id="{1AD12F8B-7E05-A047-BAC3-EE71BEBBE5BE}" type="datetime1">
               <a:rPr lang="en-CA" smtClean="0"/>
-              <a:t>2020-09-27</a:t>
+              <a:t>2025-06-09</a:t>
             </a:fld>
             <a:endParaRPr lang="en-US"/>
           </a:p>
@@ -5209,7 +5208,7 @@
           <a:p>
             <a:fld id="{C1D9F72A-E93E-B546-8268-6408A6E1DA62}" type="datetime1">
               <a:rPr lang="en-CA" smtClean="0"/>
-              <a:t>2020-09-27</a:t>
+              <a:t>2025-06-09</a:t>
             </a:fld>
             <a:endParaRPr lang="en-US"/>
           </a:p>
@@ -5452,7 +5451,7 @@
             <a:fld id="{97DF4AC7-DB73-7444-A2A7-FD79FE1A2B2B}" type="datetime1">
               <a:rPr lang="en-CA" smtClean="0"/>
               <a:pPr/>
-              <a:t>2020-09-27</a:t>
+              <a:t>2025-06-09</a:t>
             </a:fld>
             <a:endParaRPr lang="en-US" dirty="0"/>
           </a:p>
@@ -6121,160 +6120,6 @@
     <p:extLst>
       <p:ext uri="{BB962C8B-B14F-4D97-AF65-F5344CB8AC3E}">
         <p14:creationId xmlns:p14="http://schemas.microsoft.com/office/powerpoint/2010/main" val="4093168934"/>
-      </p:ext>
-    </p:extLst>
-  </p:cSld>
-  <p:clrMapOvr>
-    <a:masterClrMapping/>
-  </p:clrMapOvr>
-</p:sld>
-</file>
-
-<file path=ppt/slides/slide10.xml><?xml version="1.0" encoding="utf-8"?>
-<p:sld xmlns:a="http://schemas.openxmlformats.org/drawingml/2006/main" xmlns:r="http://schemas.openxmlformats.org/officeDocument/2006/relationships" xmlns:p="http://schemas.openxmlformats.org/presentationml/2006/main">
-  <p:cSld>
-    <p:spTree>
-      <p:nvGrpSpPr>
-        <p:cNvPr id="1" name=""/>
-        <p:cNvGrpSpPr/>
-        <p:nvPr/>
-      </p:nvGrpSpPr>
-      <p:grpSpPr>
-        <a:xfrm>
-          <a:off x="0" y="0"/>
-          <a:ext cx="0" cy="0"/>
-          <a:chOff x="0" y="0"/>
-          <a:chExt cx="0" cy="0"/>
-        </a:xfrm>
-      </p:grpSpPr>
-      <p:sp>
-        <p:nvSpPr>
-          <p:cNvPr id="90114" name="Rectangle 2"/>
-          <p:cNvSpPr>
-            <a:spLocks noGrp="1" noChangeArrowheads="1"/>
-          </p:cNvSpPr>
-          <p:nvPr>
-            <p:ph type="title"/>
-          </p:nvPr>
-        </p:nvSpPr>
-        <p:spPr/>
-        <p:txBody>
-          <a:bodyPr/>
-          <a:lstStyle/>
-          <a:p>
-            <a:r>
-              <a:rPr lang="en-US"/>
-              <a:t>Non-CF Languages</a:t>
-            </a:r>
-          </a:p>
-        </p:txBody>
-      </p:sp>
-      <p:sp>
-        <p:nvSpPr>
-          <p:cNvPr id="7" name="Slide Number Placeholder 4"/>
-          <p:cNvSpPr>
-            <a:spLocks noGrp="1"/>
-          </p:cNvSpPr>
-          <p:nvPr>
-            <p:ph type="sldNum" sz="quarter" idx="12"/>
-          </p:nvPr>
-        </p:nvSpPr>
-        <p:spPr/>
-        <p:txBody>
-          <a:bodyPr/>
-          <a:lstStyle/>
-          <a:p>
-            <a:fld id="{50CD7ACC-B430-874F-A0D5-0163F1AFB9D4}" type="slidenum">
-              <a:rPr lang="en-US"/>
-              <a:pPr/>
-              <a:t>10</a:t>
-            </a:fld>
-            <a:endParaRPr lang="en-US"/>
-          </a:p>
-        </p:txBody>
-      </p:sp>
-      <p:pic>
-        <p:nvPicPr>
-          <p:cNvPr id="90116" name="Picture 4"/>
-          <p:cNvPicPr>
-            <a:picLocks noChangeAspect="1" noChangeArrowheads="1"/>
-          </p:cNvPicPr>
-          <p:nvPr/>
-        </p:nvPicPr>
-        <p:blipFill>
-          <a:blip r:embed="rId3"/>
-          <a:srcRect/>
-          <a:stretch>
-            <a:fillRect/>
-          </a:stretch>
-        </p:blipFill>
-        <p:spPr bwMode="auto">
-          <a:xfrm>
-            <a:off x="1885950" y="1714500"/>
-            <a:ext cx="3743325" cy="361950"/>
-          </a:xfrm>
-          <a:prstGeom prst="rect">
-            <a:avLst/>
-          </a:prstGeom>
-          <a:noFill/>
-        </p:spPr>
-      </p:pic>
-      <p:pic>
-        <p:nvPicPr>
-          <p:cNvPr id="90117" name="Picture 5"/>
-          <p:cNvPicPr>
-            <a:picLocks noChangeAspect="1" noChangeArrowheads="1"/>
-          </p:cNvPicPr>
-          <p:nvPr/>
-        </p:nvPicPr>
-        <p:blipFill>
-          <a:blip r:embed="rId4"/>
-          <a:srcRect/>
-          <a:stretch>
-            <a:fillRect/>
-          </a:stretch>
-        </p:blipFill>
-        <p:spPr bwMode="auto">
-          <a:xfrm>
-            <a:off x="1885950" y="2457450"/>
-            <a:ext cx="5000625" cy="361950"/>
-          </a:xfrm>
-          <a:prstGeom prst="rect">
-            <a:avLst/>
-          </a:prstGeom>
-          <a:noFill/>
-        </p:spPr>
-      </p:pic>
-      <p:pic>
-        <p:nvPicPr>
-          <p:cNvPr id="90118" name="Picture 6"/>
-          <p:cNvPicPr>
-            <a:picLocks noChangeAspect="1" noChangeArrowheads="1"/>
-          </p:cNvPicPr>
-          <p:nvPr/>
-        </p:nvPicPr>
-        <p:blipFill>
-          <a:blip r:embed="rId5"/>
-          <a:srcRect/>
-          <a:stretch>
-            <a:fillRect/>
-          </a:stretch>
-        </p:blipFill>
-        <p:spPr bwMode="auto">
-          <a:xfrm>
-            <a:off x="1885950" y="3200400"/>
-            <a:ext cx="3419475" cy="361950"/>
-          </a:xfrm>
-          <a:prstGeom prst="rect">
-            <a:avLst/>
-          </a:prstGeom>
-          <a:noFill/>
-        </p:spPr>
-      </p:pic>
-    </p:spTree>
-    <p:extLst>
-      <p:ext uri="{BB962C8B-B14F-4D97-AF65-F5344CB8AC3E}">
-        <p14:creationId xmlns:p14="http://schemas.microsoft.com/office/powerpoint/2010/main" val="3567535350"/>
       </p:ext>
     </p:extLst>
   </p:cSld>
@@ -12754,64 +12599,6 @@
       </p:grpSpPr>
       <p:sp>
         <p:nvSpPr>
-          <p:cNvPr id="2" name="Title 1">
-            <a:extLst>
-              <a:ext uri="{FF2B5EF4-FFF2-40B4-BE49-F238E27FC236}">
-                <a16:creationId xmlns:a16="http://schemas.microsoft.com/office/drawing/2014/main" id="{DE40DCE6-8B42-EE48-AED7-7558E2C755A1}"/>
-              </a:ext>
-            </a:extLst>
-          </p:cNvPr>
-          <p:cNvSpPr>
-            <a:spLocks noGrp="1"/>
-          </p:cNvSpPr>
-          <p:nvPr>
-            <p:ph type="title"/>
-          </p:nvPr>
-        </p:nvSpPr>
-        <p:spPr/>
-        <p:txBody>
-          <a:bodyPr/>
-          <a:lstStyle/>
-          <a:p>
-            <a:r>
-              <a:rPr lang="en-US" dirty="0"/>
-              <a:t>Shift Reduce Parsing</a:t>
-            </a:r>
-          </a:p>
-        </p:txBody>
-      </p:sp>
-    </p:spTree>
-    <p:extLst>
-      <p:ext uri="{BB962C8B-B14F-4D97-AF65-F5344CB8AC3E}">
-        <p14:creationId xmlns:p14="http://schemas.microsoft.com/office/powerpoint/2010/main" val="3123431812"/>
-      </p:ext>
-    </p:extLst>
-  </p:cSld>
-  <p:clrMapOvr>
-    <a:masterClrMapping/>
-  </p:clrMapOvr>
-</p:sld>
-</file>
-
-<file path=ppt/slides/slide7.xml><?xml version="1.0" encoding="utf-8"?>
-<p:sld xmlns:a="http://schemas.openxmlformats.org/drawingml/2006/main" xmlns:r="http://schemas.openxmlformats.org/officeDocument/2006/relationships" xmlns:p="http://schemas.openxmlformats.org/presentationml/2006/main">
-  <p:cSld>
-    <p:spTree>
-      <p:nvGrpSpPr>
-        <p:cNvPr id="1" name=""/>
-        <p:cNvGrpSpPr/>
-        <p:nvPr/>
-      </p:nvGrpSpPr>
-      <p:grpSpPr>
-        <a:xfrm>
-          <a:off x="0" y="0"/>
-          <a:ext cx="0" cy="0"/>
-          <a:chOff x="0" y="0"/>
-          <a:chExt cx="0" cy="0"/>
-        </a:xfrm>
-      </p:grpSpPr>
-      <p:sp>
-        <p:nvSpPr>
           <p:cNvPr id="136194" name="Rectangle 2"/>
           <p:cNvSpPr>
             <a:spLocks noGrp="1" noChangeArrowheads="1"/>
@@ -12917,6 +12704,22 @@
               <a:t>Context-free languages can be recognized using Pushdown Automata</a:t>
             </a:r>
           </a:p>
+          <a:p>
+            <a:pPr>
+              <a:lnSpc>
+                <a:spcPct val="90000"/>
+              </a:lnSpc>
+            </a:pPr>
+            <a:r>
+              <a:rPr lang="en-US" dirty="0"/>
+              <a:t>This algorithm is called </a:t>
+            </a:r>
+            <a:r>
+              <a:rPr lang="en-US" b="1" dirty="0"/>
+              <a:t>shift-reduce parsing</a:t>
+            </a:r>
+            <a:endParaRPr lang="en-US" sz="2100" b="1" dirty="0"/>
+          </a:p>
         </p:txBody>
       </p:sp>
       <p:sp>
@@ -12937,7 +12740,7 @@
             <a:fld id="{AF1FA684-BEEE-A640-BD4B-D673202DE875}" type="slidenum">
               <a:rPr lang="en-US"/>
               <a:pPr/>
-              <a:t>7</a:t>
+              <a:t>6</a:t>
             </a:fld>
             <a:endParaRPr lang="en-US"/>
           </a:p>
@@ -13250,6 +13053,55 @@
                       </p:childTnLst>
                     </p:cTn>
                   </p:par>
+                  <p:par>
+                    <p:cTn id="27" fill="hold">
+                      <p:stCondLst>
+                        <p:cond delay="indefinite"/>
+                      </p:stCondLst>
+                      <p:childTnLst>
+                        <p:par>
+                          <p:cTn id="28" fill="hold">
+                            <p:stCondLst>
+                              <p:cond delay="0"/>
+                            </p:stCondLst>
+                            <p:childTnLst>
+                              <p:par>
+                                <p:cTn id="29" presetID="1" presetClass="entr" presetSubtype="0" fill="hold" grpId="0" nodeType="clickEffect">
+                                  <p:stCondLst>
+                                    <p:cond delay="0"/>
+                                  </p:stCondLst>
+                                  <p:childTnLst>
+                                    <p:set>
+                                      <p:cBhvr>
+                                        <p:cTn id="30" dur="1" fill="hold">
+                                          <p:stCondLst>
+                                            <p:cond delay="499"/>
+                                          </p:stCondLst>
+                                        </p:cTn>
+                                        <p:tgtEl>
+                                          <p:spTgt spid="136195">
+                                            <p:txEl>
+                                              <p:pRg st="6" end="6"/>
+                                            </p:txEl>
+                                          </p:spTgt>
+                                        </p:tgtEl>
+                                        <p:attrNameLst>
+                                          <p:attrName>style.visibility</p:attrName>
+                                        </p:attrNameLst>
+                                      </p:cBhvr>
+                                      <p:to>
+                                        <p:strVal val="visible"/>
+                                      </p:to>
+                                    </p:set>
+                                  </p:childTnLst>
+                                </p:cTn>
+                              </p:par>
+                            </p:childTnLst>
+                          </p:cTn>
+                        </p:par>
+                      </p:childTnLst>
+                    </p:cTn>
+                  </p:par>
                 </p:childTnLst>
               </p:cTn>
               <p:prevCondLst>
@@ -13278,6 +13130,64 @@
 </p:sld>
 </file>
 
+<file path=ppt/slides/slide7.xml><?xml version="1.0" encoding="utf-8"?>
+<p:sld xmlns:a="http://schemas.openxmlformats.org/drawingml/2006/main" xmlns:r="http://schemas.openxmlformats.org/officeDocument/2006/relationships" xmlns:p="http://schemas.openxmlformats.org/presentationml/2006/main">
+  <p:cSld>
+    <p:spTree>
+      <p:nvGrpSpPr>
+        <p:cNvPr id="1" name=""/>
+        <p:cNvGrpSpPr/>
+        <p:nvPr/>
+      </p:nvGrpSpPr>
+      <p:grpSpPr>
+        <a:xfrm>
+          <a:off x="0" y="0"/>
+          <a:ext cx="0" cy="0"/>
+          <a:chOff x="0" y="0"/>
+          <a:chExt cx="0" cy="0"/>
+        </a:xfrm>
+      </p:grpSpPr>
+      <p:sp>
+        <p:nvSpPr>
+          <p:cNvPr id="2" name="Title 1">
+            <a:extLst>
+              <a:ext uri="{FF2B5EF4-FFF2-40B4-BE49-F238E27FC236}">
+                <a16:creationId xmlns:a16="http://schemas.microsoft.com/office/drawing/2014/main" id="{9BEA9101-CFD5-9F42-B155-24ADC97CAEA0}"/>
+              </a:ext>
+            </a:extLst>
+          </p:cNvPr>
+          <p:cNvSpPr>
+            <a:spLocks noGrp="1"/>
+          </p:cNvSpPr>
+          <p:nvPr>
+            <p:ph type="title"/>
+          </p:nvPr>
+        </p:nvSpPr>
+        <p:spPr/>
+        <p:txBody>
+          <a:bodyPr/>
+          <a:lstStyle/>
+          <a:p>
+            <a:r>
+              <a:rPr lang="en-US" dirty="0"/>
+              <a:t>Extra Slides</a:t>
+            </a:r>
+          </a:p>
+        </p:txBody>
+      </p:sp>
+    </p:spTree>
+    <p:extLst>
+      <p:ext uri="{BB962C8B-B14F-4D97-AF65-F5344CB8AC3E}">
+        <p14:creationId xmlns:p14="http://schemas.microsoft.com/office/powerpoint/2010/main" val="2334569118"/>
+      </p:ext>
+    </p:extLst>
+  </p:cSld>
+  <p:clrMapOvr>
+    <a:masterClrMapping/>
+  </p:clrMapOvr>
+</p:sld>
+</file>
+
 <file path=ppt/slides/slide8.xml><?xml version="1.0" encoding="utf-8"?>
 <p:sld xmlns:a="http://schemas.openxmlformats.org/drawingml/2006/main" xmlns:r="http://schemas.openxmlformats.org/officeDocument/2006/relationships" xmlns:p="http://schemas.openxmlformats.org/presentationml/2006/main">
   <p:cSld>
@@ -13297,64 +13207,6 @@
       </p:grpSpPr>
       <p:sp>
         <p:nvSpPr>
-          <p:cNvPr id="2" name="Title 1">
-            <a:extLst>
-              <a:ext uri="{FF2B5EF4-FFF2-40B4-BE49-F238E27FC236}">
-                <a16:creationId xmlns:a16="http://schemas.microsoft.com/office/drawing/2014/main" id="{9BEA9101-CFD5-9F42-B155-24ADC97CAEA0}"/>
-              </a:ext>
-            </a:extLst>
-          </p:cNvPr>
-          <p:cNvSpPr>
-            <a:spLocks noGrp="1"/>
-          </p:cNvSpPr>
-          <p:nvPr>
-            <p:ph type="title"/>
-          </p:nvPr>
-        </p:nvSpPr>
-        <p:spPr/>
-        <p:txBody>
-          <a:bodyPr/>
-          <a:lstStyle/>
-          <a:p>
-            <a:r>
-              <a:rPr lang="en-US" dirty="0"/>
-              <a:t>Extra Slides</a:t>
-            </a:r>
-          </a:p>
-        </p:txBody>
-      </p:sp>
-    </p:spTree>
-    <p:extLst>
-      <p:ext uri="{BB962C8B-B14F-4D97-AF65-F5344CB8AC3E}">
-        <p14:creationId xmlns:p14="http://schemas.microsoft.com/office/powerpoint/2010/main" val="2334569118"/>
-      </p:ext>
-    </p:extLst>
-  </p:cSld>
-  <p:clrMapOvr>
-    <a:masterClrMapping/>
-  </p:clrMapOvr>
-</p:sld>
-</file>
-
-<file path=ppt/slides/slide9.xml><?xml version="1.0" encoding="utf-8"?>
-<p:sld xmlns:a="http://schemas.openxmlformats.org/drawingml/2006/main" xmlns:r="http://schemas.openxmlformats.org/officeDocument/2006/relationships" xmlns:p="http://schemas.openxmlformats.org/presentationml/2006/main">
-  <p:cSld>
-    <p:spTree>
-      <p:nvGrpSpPr>
-        <p:cNvPr id="1" name=""/>
-        <p:cNvGrpSpPr/>
-        <p:nvPr/>
-      </p:nvGrpSpPr>
-      <p:grpSpPr>
-        <a:xfrm>
-          <a:off x="0" y="0"/>
-          <a:ext cx="0" cy="0"/>
-          <a:chOff x="0" y="0"/>
-          <a:chExt cx="0" cy="0"/>
-        </a:xfrm>
-      </p:grpSpPr>
-      <p:sp>
-        <p:nvSpPr>
           <p:cNvPr id="92162" name="Rectangle 2"/>
           <p:cNvSpPr>
             <a:spLocks noGrp="1" noChangeArrowheads="1"/>
@@ -13393,7 +13245,7 @@
             <a:fld id="{F23FA4EE-052C-BD4C-BAC6-E12282472540}" type="slidenum">
               <a:rPr lang="en-US"/>
               <a:pPr/>
-              <a:t>9</a:t>
+              <a:t>8</a:t>
             </a:fld>
             <a:endParaRPr lang="en-US"/>
           </a:p>
@@ -13766,6 +13618,160 @@
       </p:par>
     </p:tnLst>
   </p:timing>
+</p:sld>
+</file>
+
+<file path=ppt/slides/slide9.xml><?xml version="1.0" encoding="utf-8"?>
+<p:sld xmlns:a="http://schemas.openxmlformats.org/drawingml/2006/main" xmlns:r="http://schemas.openxmlformats.org/officeDocument/2006/relationships" xmlns:p="http://schemas.openxmlformats.org/presentationml/2006/main">
+  <p:cSld>
+    <p:spTree>
+      <p:nvGrpSpPr>
+        <p:cNvPr id="1" name=""/>
+        <p:cNvGrpSpPr/>
+        <p:nvPr/>
+      </p:nvGrpSpPr>
+      <p:grpSpPr>
+        <a:xfrm>
+          <a:off x="0" y="0"/>
+          <a:ext cx="0" cy="0"/>
+          <a:chOff x="0" y="0"/>
+          <a:chExt cx="0" cy="0"/>
+        </a:xfrm>
+      </p:grpSpPr>
+      <p:sp>
+        <p:nvSpPr>
+          <p:cNvPr id="90114" name="Rectangle 2"/>
+          <p:cNvSpPr>
+            <a:spLocks noGrp="1" noChangeArrowheads="1"/>
+          </p:cNvSpPr>
+          <p:nvPr>
+            <p:ph type="title"/>
+          </p:nvPr>
+        </p:nvSpPr>
+        <p:spPr/>
+        <p:txBody>
+          <a:bodyPr/>
+          <a:lstStyle/>
+          <a:p>
+            <a:r>
+              <a:rPr lang="en-US"/>
+              <a:t>Non-CF Languages</a:t>
+            </a:r>
+          </a:p>
+        </p:txBody>
+      </p:sp>
+      <p:sp>
+        <p:nvSpPr>
+          <p:cNvPr id="7" name="Slide Number Placeholder 4"/>
+          <p:cNvSpPr>
+            <a:spLocks noGrp="1"/>
+          </p:cNvSpPr>
+          <p:nvPr>
+            <p:ph type="sldNum" sz="quarter" idx="12"/>
+          </p:nvPr>
+        </p:nvSpPr>
+        <p:spPr/>
+        <p:txBody>
+          <a:bodyPr/>
+          <a:lstStyle/>
+          <a:p>
+            <a:fld id="{50CD7ACC-B430-874F-A0D5-0163F1AFB9D4}" type="slidenum">
+              <a:rPr lang="en-US"/>
+              <a:pPr/>
+              <a:t>9</a:t>
+            </a:fld>
+            <a:endParaRPr lang="en-US"/>
+          </a:p>
+        </p:txBody>
+      </p:sp>
+      <p:pic>
+        <p:nvPicPr>
+          <p:cNvPr id="90116" name="Picture 4"/>
+          <p:cNvPicPr>
+            <a:picLocks noChangeAspect="1" noChangeArrowheads="1"/>
+          </p:cNvPicPr>
+          <p:nvPr/>
+        </p:nvPicPr>
+        <p:blipFill>
+          <a:blip r:embed="rId3"/>
+          <a:srcRect/>
+          <a:stretch>
+            <a:fillRect/>
+          </a:stretch>
+        </p:blipFill>
+        <p:spPr bwMode="auto">
+          <a:xfrm>
+            <a:off x="1885950" y="1714500"/>
+            <a:ext cx="3743325" cy="361950"/>
+          </a:xfrm>
+          <a:prstGeom prst="rect">
+            <a:avLst/>
+          </a:prstGeom>
+          <a:noFill/>
+        </p:spPr>
+      </p:pic>
+      <p:pic>
+        <p:nvPicPr>
+          <p:cNvPr id="90117" name="Picture 5"/>
+          <p:cNvPicPr>
+            <a:picLocks noChangeAspect="1" noChangeArrowheads="1"/>
+          </p:cNvPicPr>
+          <p:nvPr/>
+        </p:nvPicPr>
+        <p:blipFill>
+          <a:blip r:embed="rId4"/>
+          <a:srcRect/>
+          <a:stretch>
+            <a:fillRect/>
+          </a:stretch>
+        </p:blipFill>
+        <p:spPr bwMode="auto">
+          <a:xfrm>
+            <a:off x="1885950" y="2457450"/>
+            <a:ext cx="5000625" cy="361950"/>
+          </a:xfrm>
+          <a:prstGeom prst="rect">
+            <a:avLst/>
+          </a:prstGeom>
+          <a:noFill/>
+        </p:spPr>
+      </p:pic>
+      <p:pic>
+        <p:nvPicPr>
+          <p:cNvPr id="90118" name="Picture 6"/>
+          <p:cNvPicPr>
+            <a:picLocks noChangeAspect="1" noChangeArrowheads="1"/>
+          </p:cNvPicPr>
+          <p:nvPr/>
+        </p:nvPicPr>
+        <p:blipFill>
+          <a:blip r:embed="rId5"/>
+          <a:srcRect/>
+          <a:stretch>
+            <a:fillRect/>
+          </a:stretch>
+        </p:blipFill>
+        <p:spPr bwMode="auto">
+          <a:xfrm>
+            <a:off x="1885950" y="3200400"/>
+            <a:ext cx="3419475" cy="361950"/>
+          </a:xfrm>
+          <a:prstGeom prst="rect">
+            <a:avLst/>
+          </a:prstGeom>
+          <a:noFill/>
+        </p:spPr>
+      </p:pic>
+    </p:spTree>
+    <p:extLst>
+      <p:ext uri="{BB962C8B-B14F-4D97-AF65-F5344CB8AC3E}">
+        <p14:creationId xmlns:p14="http://schemas.microsoft.com/office/powerpoint/2010/main" val="3567535350"/>
+      </p:ext>
+    </p:extLst>
+  </p:cSld>
+  <p:clrMapOvr>
+    <a:masterClrMapping/>
+  </p:clrMapOvr>
 </p:sld>
 </file>
 
